--- a/assets/pptx/catalog-269.pptx
+++ b/assets/pptx/catalog-269.pptx
@@ -3245,7 +3245,7 @@
                 <a:ea typeface="Ebrima"/>
                 <a:cs typeface="Ebrima"/>
               </a:rPr>
-              <a:t>ማሳዘን አልፈልግም አንተን (2x)</a:t>
+              <a:t>ማሳዘን አልፈልግም አንተን 2x</a:t>
             </a:r>
           </a:p>
           <a:p>
@@ -3263,7 +3263,7 @@
                 <a:ea typeface="Ebrima"/>
                 <a:cs typeface="Ebrima"/>
               </a:rPr>
-              <a:t>ማስቀየም አልፈልግም አንተን (2x)</a:t>
+              <a:t>ማስቀየም አልፈልግም አንተን 2x</a:t>
             </a:r>
           </a:p>
           <a:p>
@@ -3281,7 +3281,7 @@
                 <a:ea typeface="Ebrima"/>
                 <a:cs typeface="Ebrima"/>
               </a:rPr>
-              <a:t>ላሳዝንህ አልፈልግም አንተን (2x)</a:t>
+              <a:t>ላሳዝንህ አልፈልግም አንተን 2x</a:t>
             </a:r>
           </a:p>
           <a:p>
@@ -3299,7 +3299,7 @@
                 <a:ea typeface="Ebrima"/>
                 <a:cs typeface="Ebrima"/>
               </a:rPr>
-              <a:t>ላስቀይምህ አልፈልግም አንተን (2x)</a:t>
+              <a:t>ላስቀይምህ አልፈልግም አንተን 2x</a:t>
             </a:r>
           </a:p>
           <a:p>
@@ -3335,7 +3335,7 @@
                 <a:ea typeface="Ebrima"/>
                 <a:cs typeface="Ebrima"/>
               </a:rPr>
-              <a:t>ያደረከው ለሕይወቴ ለቤቴ ለኑሮዬ (2x)</a:t>
+              <a:t>ያደረከው ለሕይወቴ ለቤቴ ለኑሮዬ 2x</a:t>
             </a:r>
           </a:p>
           <a:p>
@@ -3353,7 +3353,7 @@
                 <a:ea typeface="Ebrima"/>
                 <a:cs typeface="Ebrima"/>
               </a:rPr>
-              <a:t>ማሳዘን አልፈልግም አንተን (2x)</a:t>
+              <a:t>ማሳዘን አልፈልግም አንተን 2x</a:t>
             </a:r>
           </a:p>
           <a:p>
@@ -3371,7 +3371,7 @@
                 <a:ea typeface="Ebrima"/>
                 <a:cs typeface="Ebrima"/>
               </a:rPr>
-              <a:t>ማስቀየም አልፈልግም አንተን (2x)</a:t>
+              <a:t>ማስቀየም አልፈልግም አንተን 2x</a:t>
             </a:r>
           </a:p>
           <a:p>
@@ -3407,7 +3407,7 @@
                 <a:ea typeface="Ebrima"/>
                 <a:cs typeface="Ebrima"/>
               </a:rPr>
-              <a:t>ያደረከው ለሕይወቴ ለቤቴ ለኑሮዬ (2x)</a:t>
+              <a:t>ያደረከው ለሕይወቴ ለቤቴ ለኑሮዬ 2x</a:t>
             </a:r>
           </a:p>
         </p:txBody>
@@ -3649,7 +3649,7 @@
                 <a:ea typeface="Ebrima"/>
                 <a:cs typeface="Ebrima"/>
               </a:rPr>
-              <a:t>ማሳዘን አልፈልግም አንተን (2x)</a:t>
+              <a:t>ማሳዘን አልፈልግም አንተን 2x</a:t>
             </a:r>
           </a:p>
           <a:p>
@@ -3667,7 +3667,7 @@
                 <a:ea typeface="Ebrima"/>
                 <a:cs typeface="Ebrima"/>
               </a:rPr>
-              <a:t>ማስቀየም አልፈልግም አንተን (2x)</a:t>
+              <a:t>ማስቀየም አልፈልግም አንተን 2x</a:t>
             </a:r>
           </a:p>
           <a:p>
@@ -3685,7 +3685,7 @@
                 <a:ea typeface="Ebrima"/>
                 <a:cs typeface="Ebrima"/>
               </a:rPr>
-              <a:t>ላሳዝንህ አልፈልግም አንተን (2x)</a:t>
+              <a:t>ላሳዝንህ አልፈልግም አንተን 2x</a:t>
             </a:r>
           </a:p>
           <a:p>
@@ -3703,7 +3703,7 @@
                 <a:ea typeface="Ebrima"/>
                 <a:cs typeface="Ebrima"/>
               </a:rPr>
-              <a:t>ላስቀይምህ አልፈልግም አንተን (2x)</a:t>
+              <a:t>ላስቀይምህ አልፈልግም አንተን 2x</a:t>
             </a:r>
           </a:p>
           <a:p>
@@ -3739,7 +3739,7 @@
                 <a:ea typeface="Ebrima"/>
                 <a:cs typeface="Ebrima"/>
               </a:rPr>
-              <a:t>ያደረከው ለሕይወቴ ለቤቴ ለኑሮዬ (2x)</a:t>
+              <a:t>ያደረከው ለሕይወቴ ለቤቴ ለኑሮዬ 2x</a:t>
             </a:r>
           </a:p>
           <a:p>
@@ -3757,7 +3757,7 @@
                 <a:ea typeface="Ebrima"/>
                 <a:cs typeface="Ebrima"/>
               </a:rPr>
-              <a:t>ማሳዘን አልፈልግም አንተን (2x)</a:t>
+              <a:t>ማሳዘን አልፈልግም አንተን 2x</a:t>
             </a:r>
           </a:p>
           <a:p>
@@ -3775,7 +3775,7 @@
                 <a:ea typeface="Ebrima"/>
                 <a:cs typeface="Ebrima"/>
               </a:rPr>
-              <a:t>ማስቀየም አልፈልግም አንተን (2x)</a:t>
+              <a:t>ማስቀየም አልፈልግም አንተን 2x</a:t>
             </a:r>
           </a:p>
           <a:p>
@@ -3811,7 +3811,7 @@
                 <a:ea typeface="Ebrima"/>
                 <a:cs typeface="Ebrima"/>
               </a:rPr>
-              <a:t>ያደረከው ለሕይወቴ ለቤቴ ለኑሮዬ (2x)</a:t>
+              <a:t>ያደረከው ለሕይወቴ ለቤቴ ለኑሮዬ 2x</a:t>
             </a:r>
           </a:p>
         </p:txBody>
@@ -4004,7 +4004,7 @@
                 <a:ea typeface="Ebrima"/>
                 <a:cs typeface="Ebrima"/>
               </a:rPr>
-              <a:t>የቀረ ይቀራል እንጂ (3x)</a:t>
+              <a:t>የቀረ ይቀራል እንጂ 3x</a:t>
             </a:r>
           </a:p>
           <a:p>
@@ -4022,7 +4022,7 @@
                 <a:ea typeface="Ebrima"/>
                 <a:cs typeface="Ebrima"/>
               </a:rPr>
-              <a:t>አሳዝኜው አልወጣም/አልርቅም ከእርሱ እጅ (4x)</a:t>
+              <a:t>አሳዝኜው አልወጣም/አልርቅም ከእርሱ እጅ 4x</a:t>
             </a:r>
           </a:p>
         </p:txBody>
@@ -4089,7 +4089,7 @@
                 <a:ea typeface="Ebrima"/>
                 <a:cs typeface="Ebrima"/>
               </a:rPr>
-              <a:t>ማሳዘን አልፈልግም አንተን (2x)</a:t>
+              <a:t>ማሳዘን አልፈልግም አንተን 2x</a:t>
             </a:r>
           </a:p>
           <a:p>
@@ -4107,7 +4107,7 @@
                 <a:ea typeface="Ebrima"/>
                 <a:cs typeface="Ebrima"/>
               </a:rPr>
-              <a:t>ማስቀየም አልፈልግም አንተን (2x)</a:t>
+              <a:t>ማስቀየም አልፈልግም አንተን 2x</a:t>
             </a:r>
           </a:p>
           <a:p>
@@ -4125,7 +4125,7 @@
                 <a:ea typeface="Ebrima"/>
                 <a:cs typeface="Ebrima"/>
               </a:rPr>
-              <a:t>ላሳዝንህ አልፈልግም አንተን (2x)</a:t>
+              <a:t>ላሳዝንህ አልፈልግም አንተን 2x</a:t>
             </a:r>
           </a:p>
           <a:p>
@@ -4143,7 +4143,7 @@
                 <a:ea typeface="Ebrima"/>
                 <a:cs typeface="Ebrima"/>
               </a:rPr>
-              <a:t>ላስቀይምህ አልፈልግም አንተን (2x)</a:t>
+              <a:t>ላስቀይምህ አልፈልግም አንተን 2x</a:t>
             </a:r>
           </a:p>
           <a:p>
@@ -4179,7 +4179,7 @@
                 <a:ea typeface="Ebrima"/>
                 <a:cs typeface="Ebrima"/>
               </a:rPr>
-              <a:t>ያደረከው ለሕይወቴ ለቤቴ ለኑሮዬ (2x)</a:t>
+              <a:t>ያደረከው ለሕይወቴ ለቤቴ ለኑሮዬ 2x</a:t>
             </a:r>
           </a:p>
           <a:p>
@@ -4197,7 +4197,7 @@
                 <a:ea typeface="Ebrima"/>
                 <a:cs typeface="Ebrima"/>
               </a:rPr>
-              <a:t>ማሳዘን አልፈልግም አንተን (2x)</a:t>
+              <a:t>ማሳዘን አልፈልግም አንተን 2x</a:t>
             </a:r>
           </a:p>
           <a:p>
@@ -4215,7 +4215,7 @@
                 <a:ea typeface="Ebrima"/>
                 <a:cs typeface="Ebrima"/>
               </a:rPr>
-              <a:t>ማስቀየም አልፈልግም አንተን (2x)</a:t>
+              <a:t>ማስቀየም አልፈልግም አንተን 2x</a:t>
             </a:r>
           </a:p>
           <a:p>
@@ -4251,7 +4251,7 @@
                 <a:ea typeface="Ebrima"/>
                 <a:cs typeface="Ebrima"/>
               </a:rPr>
-              <a:t>ያደረከው ለሕይወቴ ለቤቴ ለኑሮዬ (2x)</a:t>
+              <a:t>ያደረከው ለሕይወቴ ለቤቴ ለኑሮዬ 2x</a:t>
             </a:r>
           </a:p>
         </p:txBody>
